--- a/ゲーム科1年/01_後期/プログラミングⅢ/12_仮想関数とオーバーライド.pptx
+++ b/ゲーム科1年/01_後期/プログラミングⅢ/12_仮想関数とオーバーライド.pptx
@@ -273,7 +273,7 @@
           <a:p>
             <a:fld id="{E9CC885B-4903-4D54-9A93-00025F12DED9}" type="datetimeFigureOut">
               <a:rPr kumimoji="1" lang="ja-JP" altLang="en-US" smtClean="0"/>
-              <a:t>2024/11/11</a:t>
+              <a:t>2025/3/3</a:t>
             </a:fld>
             <a:endParaRPr kumimoji="1" lang="ja-JP" altLang="en-US"/>
           </a:p>
@@ -503,7 +503,7 @@
           <a:p>
             <a:fld id="{E9CC885B-4903-4D54-9A93-00025F12DED9}" type="datetimeFigureOut">
               <a:rPr kumimoji="1" lang="ja-JP" altLang="en-US" smtClean="0"/>
-              <a:t>2024/11/11</a:t>
+              <a:t>2025/3/3</a:t>
             </a:fld>
             <a:endParaRPr kumimoji="1" lang="ja-JP" altLang="en-US"/>
           </a:p>
@@ -743,7 +743,7 @@
           <a:p>
             <a:fld id="{E9CC885B-4903-4D54-9A93-00025F12DED9}" type="datetimeFigureOut">
               <a:rPr kumimoji="1" lang="ja-JP" altLang="en-US" smtClean="0"/>
-              <a:t>2024/11/11</a:t>
+              <a:t>2025/3/3</a:t>
             </a:fld>
             <a:endParaRPr kumimoji="1" lang="ja-JP" altLang="en-US"/>
           </a:p>
@@ -973,7 +973,7 @@
           <a:p>
             <a:fld id="{E9CC885B-4903-4D54-9A93-00025F12DED9}" type="datetimeFigureOut">
               <a:rPr kumimoji="1" lang="ja-JP" altLang="en-US" smtClean="0"/>
-              <a:t>2024/11/11</a:t>
+              <a:t>2025/3/3</a:t>
             </a:fld>
             <a:endParaRPr kumimoji="1" lang="ja-JP" altLang="en-US"/>
           </a:p>
@@ -1248,7 +1248,7 @@
           <a:p>
             <a:fld id="{E9CC885B-4903-4D54-9A93-00025F12DED9}" type="datetimeFigureOut">
               <a:rPr kumimoji="1" lang="ja-JP" altLang="en-US" smtClean="0"/>
-              <a:t>2024/11/11</a:t>
+              <a:t>2025/3/3</a:t>
             </a:fld>
             <a:endParaRPr kumimoji="1" lang="ja-JP" altLang="en-US"/>
           </a:p>
@@ -1577,7 +1577,7 @@
           <a:p>
             <a:fld id="{E9CC885B-4903-4D54-9A93-00025F12DED9}" type="datetimeFigureOut">
               <a:rPr kumimoji="1" lang="ja-JP" altLang="en-US" smtClean="0"/>
-              <a:t>2024/11/11</a:t>
+              <a:t>2025/3/3</a:t>
             </a:fld>
             <a:endParaRPr kumimoji="1" lang="ja-JP" altLang="en-US"/>
           </a:p>
@@ -2053,7 +2053,7 @@
           <a:p>
             <a:fld id="{E9CC885B-4903-4D54-9A93-00025F12DED9}" type="datetimeFigureOut">
               <a:rPr kumimoji="1" lang="ja-JP" altLang="en-US" smtClean="0"/>
-              <a:t>2024/11/11</a:t>
+              <a:t>2025/3/3</a:t>
             </a:fld>
             <a:endParaRPr kumimoji="1" lang="ja-JP" altLang="en-US"/>
           </a:p>
@@ -2194,7 +2194,7 @@
           <a:p>
             <a:fld id="{E9CC885B-4903-4D54-9A93-00025F12DED9}" type="datetimeFigureOut">
               <a:rPr kumimoji="1" lang="ja-JP" altLang="en-US" smtClean="0"/>
-              <a:t>2024/11/11</a:t>
+              <a:t>2025/3/3</a:t>
             </a:fld>
             <a:endParaRPr kumimoji="1" lang="ja-JP" altLang="en-US"/>
           </a:p>
@@ -2307,7 +2307,7 @@
           <a:p>
             <a:fld id="{E9CC885B-4903-4D54-9A93-00025F12DED9}" type="datetimeFigureOut">
               <a:rPr kumimoji="1" lang="ja-JP" altLang="en-US" smtClean="0"/>
-              <a:t>2024/11/11</a:t>
+              <a:t>2025/3/3</a:t>
             </a:fld>
             <a:endParaRPr kumimoji="1" lang="ja-JP" altLang="en-US"/>
           </a:p>
@@ -2650,7 +2650,7 @@
           <a:p>
             <a:fld id="{E9CC885B-4903-4D54-9A93-00025F12DED9}" type="datetimeFigureOut">
               <a:rPr kumimoji="1" lang="ja-JP" altLang="en-US" smtClean="0"/>
-              <a:t>2024/11/11</a:t>
+              <a:t>2025/3/3</a:t>
             </a:fld>
             <a:endParaRPr kumimoji="1" lang="ja-JP" altLang="en-US"/>
           </a:p>
@@ -2938,7 +2938,7 @@
           <a:p>
             <a:fld id="{E9CC885B-4903-4D54-9A93-00025F12DED9}" type="datetimeFigureOut">
               <a:rPr kumimoji="1" lang="ja-JP" altLang="en-US" smtClean="0"/>
-              <a:t>2024/11/11</a:t>
+              <a:t>2025/3/3</a:t>
             </a:fld>
             <a:endParaRPr kumimoji="1" lang="ja-JP" altLang="en-US"/>
           </a:p>
@@ -3211,7 +3211,7 @@
           <a:p>
             <a:fld id="{E9CC885B-4903-4D54-9A93-00025F12DED9}" type="datetimeFigureOut">
               <a:rPr kumimoji="1" lang="ja-JP" altLang="en-US" smtClean="0"/>
-              <a:t>2024/11/11</a:t>
+              <a:t>2025/3/3</a:t>
             </a:fld>
             <a:endParaRPr kumimoji="1" lang="ja-JP" altLang="en-US"/>
           </a:p>
@@ -4116,7 +4116,7 @@
         <p:spPr>
           <a:xfrm>
             <a:off x="567542" y="1216429"/>
-            <a:ext cx="9725739" cy="2677656"/>
+            <a:ext cx="10341293" cy="2677656"/>
           </a:xfrm>
           <a:prstGeom prst="rect">
             <a:avLst/>
@@ -4131,7 +4131,31 @@
           <a:p>
             <a:r>
               <a:rPr lang="ja-JP" altLang="en-US" sz="2400" dirty="0"/>
-              <a:t>この問題を解決するのが仮想関数とオーバーライド関数となります。</a:t>
+              <a:t>この問題を解決するのが</a:t>
+            </a:r>
+            <a:r>
+              <a:rPr lang="ja-JP" altLang="en-US" sz="2400" b="1" dirty="0">
+                <a:solidFill>
+                  <a:srgbClr val="FF0000"/>
+                </a:solidFill>
+              </a:rPr>
+              <a:t>仮想関数</a:t>
+            </a:r>
+            <a:r>
+              <a:rPr lang="ja-JP" altLang="en-US" sz="2400" dirty="0"/>
+              <a:t>と</a:t>
+            </a:r>
+            <a:r>
+              <a:rPr lang="ja-JP" altLang="en-US" sz="2400" b="1" dirty="0">
+                <a:solidFill>
+                  <a:srgbClr val="FF0000"/>
+                </a:solidFill>
+              </a:rPr>
+              <a:t>オーバーライド関数</a:t>
+            </a:r>
+            <a:r>
+              <a:rPr lang="ja-JP" altLang="en-US" sz="2400" dirty="0"/>
+              <a:t>となります。</a:t>
             </a:r>
             <a:endParaRPr lang="en-US" altLang="ja-JP" sz="2400" dirty="0"/>
           </a:p>
@@ -4156,7 +4180,7 @@
           <a:p>
             <a:r>
               <a:rPr lang="ja-JP" altLang="en-US" sz="2400" dirty="0"/>
-              <a:t>仮想として関数を定義しておくテクニック</a:t>
+              <a:t>派生先のクラスで実装することを想定して関数を定義しておくテクニック</a:t>
             </a:r>
             <a:endParaRPr lang="en-US" altLang="ja-JP" sz="2400" dirty="0"/>
           </a:p>
@@ -5179,7 +5203,7 @@
           <a:p>
             <a:r>
               <a:rPr lang="ja-JP" altLang="en-US" sz="2400" dirty="0"/>
-              <a:t>このテクニックを軸にシステムをくみ上げていきます。</a:t>
+              <a:t>このテクニックを軸にシステムを設計します。</a:t>
             </a:r>
             <a:endParaRPr lang="en-US" altLang="ja-JP" sz="2400" dirty="0"/>
           </a:p>
@@ -6465,7 +6489,7 @@
             </a:r>
             <a:r>
               <a:rPr lang="ja-JP" altLang="en-US" sz="2400" dirty="0"/>
-              <a:t>クラスのものを読んているからです。</a:t>
+              <a:t>クラスのものを呼んでいるからです。</a:t>
             </a:r>
             <a:endParaRPr lang="en-US" altLang="ja-JP" sz="2400" dirty="0"/>
           </a:p>
